--- a/Quadro_Aulas_Report_2026-06-19.pptx
+++ b/Quadro_Aulas_Report_2026-06-19.pptx
@@ -1038,7 +1038,7 @@
                   <a:srgbClr val="8FA3C0"/>
                 </a:solidFill>
               </a:rPr>
-              <a:t>19 de Junho de 2026 as 09:30</a:t>
+              <a:t>19 de Junho de 2026 as 19:45</a:t>
             </a:r>
             <a:endParaRPr lang="en-US" sz="700" dirty="0"/>
           </a:p>
@@ -1135,7 +1135,7 @@
                   <a:srgbClr val="FFFFFF"/>
                 </a:solidFill>
               </a:rPr>
-              <a:t>395</a:t>
+              <a:t>396</a:t>
             </a:r>
             <a:endParaRPr lang="en-US" sz="2400" dirty="0"/>
           </a:p>
@@ -1207,7 +1207,7 @@
                   <a:srgbClr val="4ADE80"/>
                 </a:solidFill>
               </a:rPr>
-              <a:t>321</a:t>
+              <a:t>322</a:t>
             </a:r>
             <a:endParaRPr lang="en-US" sz="2400" dirty="0"/>
           </a:p>
@@ -1473,7 +1473,7 @@
                   <a:srgbClr val="8FA3C0"/>
                 </a:solidFill>
               </a:rPr>
-              <a:t>81% concluido  .  321 de 395 itens</a:t>
+              <a:t>81% concluido  .  322 de 396 itens</a:t>
             </a:r>
             <a:endParaRPr lang="en-US" sz="700" dirty="0"/>
           </a:p>
@@ -1854,7 +1854,7 @@
                   <a:srgbClr val="222222"/>
                 </a:solidFill>
               </a:rPr>
-              <a:t>A Fazer: 2 . Em progresso: 0 . Finalizados: 67</a:t>
+              <a:t>A Fazer: 1 . Em progresso: 0 . Finalizados: 68</a:t>
             </a:r>
             <a:endParaRPr lang="en-US" sz="750" dirty="0"/>
           </a:p>
@@ -1890,7 +1890,7 @@
                   <a:srgbClr val="222222"/>
                 </a:solidFill>
               </a:rPr>
-              <a:t>Est: 274h . Real: 264.8h . Rem: 5h</a:t>
+              <a:t>Est: 274h . Real: 268.8h . Rem: 1h</a:t>
             </a:r>
             <a:endParaRPr lang="en-US" sz="750" dirty="0"/>
           </a:p>
@@ -2016,7 +2016,7 @@
         <p:spPr>
           <a:xfrm>
             <a:off x="2514600" y="1033272"/>
-            <a:ext cx="2137593" cy="50292"/>
+            <a:ext cx="2181667" cy="50292"/>
           </a:xfrm>
           <a:prstGeom prst="rect">
             <a:avLst/>
@@ -2062,7 +2062,7 @@
                   <a:srgbClr val="888888"/>
                 </a:solidFill>
               </a:rPr>
-              <a:t>Subs: 97% · 67 de 69</a:t>
+              <a:t>Subs: 99% · 68 de 69</a:t>
             </a:r>
             <a:endParaRPr lang="en-US" sz="650" dirty="0"/>
           </a:p>
@@ -2299,7 +2299,7 @@
                   <a:srgbClr val="222222"/>
                 </a:solidFill>
               </a:rPr>
-              <a:t>Est: 429.5h . Real: 521.8h . Rem: 30.5h</a:t>
+              <a:t>Est: 429.5h . Real: 522.8h . Rem: 30.5h</a:t>
             </a:r>
             <a:endParaRPr lang="en-US" sz="750" dirty="0"/>
           </a:p>
@@ -2507,7 +2507,7 @@
                   <a:srgbClr val="DC2626"/>
                 </a:solidFill>
               </a:rPr>
-              <a:t>Projetado: 552.3h (+122.8h / +29%)</a:t>
+              <a:t>Projetado: 553.3h (+123.8h / +29%)</a:t>
             </a:r>
             <a:endParaRPr lang="en-US" sz="800" dirty="0"/>
           </a:p>
@@ -2640,7 +2640,7 @@
                   <a:srgbClr val="DC2626"/>
                 </a:solidFill>
               </a:rPr>
-              <a:t>+3h (+150%)</a:t>
+              <a:t>+4h (+200%)</a:t>
             </a:r>
             <a:endParaRPr lang="en-US" sz="700" dirty="0"/>
           </a:p>
@@ -3767,7 +3767,7 @@
                   <a:srgbClr val="D97706"/>
                 </a:solidFill>
               </a:rPr>
-              <a:t>1260.4h</a:t>
+              <a:t>1270.4h</a:t>
             </a:r>
             <a:endParaRPr lang="en-US" sz="2400" dirty="0"/>
           </a:p>
@@ -3900,7 +3900,7 @@
                   <a:srgbClr val="F87171"/>
                 </a:solidFill>
               </a:rPr>
-              <a:t>146.5h</a:t>
+              <a:t>142.5h</a:t>
             </a:r>
             <a:endParaRPr lang="en-US" sz="2400" dirty="0"/>
           </a:p>
@@ -4033,7 +4033,7 @@
                   <a:srgbClr val="D97706"/>
                 </a:solidFill>
               </a:rPr>
-              <a:t>+153.9h</a:t>
+              <a:t>+159.9h</a:t>
             </a:r>
             <a:endParaRPr lang="en-US" sz="2400" dirty="0"/>
           </a:p>
@@ -4069,7 +4069,7 @@
                   <a:srgbClr val="888888"/>
                 </a:solidFill>
               </a:rPr>
-              <a:t>projetado: 1406.9h (+12%)</a:t>
+              <a:t>projetado: 1412.9h (+13%)</a:t>
             </a:r>
             <a:endParaRPr lang="en-US" sz="700" dirty="0"/>
           </a:p>
@@ -4084,7 +4084,7 @@
         <p:spPr>
           <a:xfrm>
             <a:off x="2441448" y="2916936"/>
-            <a:ext cx="8642390" cy="54864"/>
+            <a:ext cx="8673966" cy="54864"/>
           </a:xfrm>
           <a:prstGeom prst="rect">
             <a:avLst/>
@@ -4108,8 +4108,8 @@
         </p:nvSpPr>
         <p:spPr>
           <a:xfrm>
-            <a:off x="11083838" y="2916936"/>
-            <a:ext cx="1004530" cy="54864"/>
+            <a:off x="11115414" y="2916936"/>
+            <a:ext cx="972954" cy="54864"/>
           </a:xfrm>
           <a:prstGeom prst="rect">
             <a:avLst/>
@@ -5167,7 +5167,7 @@
                   <a:srgbClr val="D85A30"/>
                 </a:solidFill>
               </a:rPr>
-              <a:t>17.1%</a:t>
+              <a:t>17.0%</a:t>
             </a:r>
             <a:endParaRPr lang="en-US" sz="2200" dirty="0"/>
           </a:p>
@@ -5566,7 +5566,7 @@
                   <a:srgbClr val="1D9E75"/>
                 </a:solidFill>
               </a:rPr>
-              <a:t>82.9%</a:t>
+              <a:t>83.0%</a:t>
             </a:r>
             <a:endParaRPr lang="en-US" sz="2200" dirty="0"/>
           </a:p>
@@ -5853,7 +5853,7 @@
                   <a:srgbClr val="222222"/>
                 </a:solidFill>
               </a:rPr>
-              <a:t>#404988 +3h(+150%) [gabrielpigatto frwk.com.br]</a:t>
+              <a:t>#404988 +4h(+200%) [gabrielpigatto frwk.com.br]</a:t>
             </a:r>
             <a:endParaRPr lang="en-US" sz="750" dirty="0"/>
           </a:p>
@@ -6432,7 +6432,7 @@
                   <a:srgbClr val="FFFFFF"/>
                 </a:solidFill>
               </a:rPr>
-              <a:t>132</a:t>
+              <a:t>133</a:t>
             </a:r>
             <a:endParaRPr lang="en-US" sz="650" dirty="0"/>
           </a:p>
@@ -6482,7 +6482,7 @@
                   <a:srgbClr val="222222"/>
                 </a:solidFill>
               </a:rPr>
-              <a:t>132 itens criados pos 01/05</a:t>
+              <a:t>133 itens criados pos 01/05</a:t>
             </a:r>
             <a:endParaRPr lang="en-US" sz="750" dirty="0"/>
           </a:p>
@@ -6855,7 +6855,7 @@
                   <a:srgbClr val="D97706"/>
                 </a:solidFill>
               </a:rPr>
-              <a:t>216.2h · 41 subs finalizadas</a:t>
+              <a:t>222.2h · 41 subs finalizadas</a:t>
             </a:r>
             <a:endParaRPr lang="en-US" sz="950" dirty="0"/>
           </a:p>
@@ -7608,7 +7608,7 @@
                   <a:srgbClr val="D85A30"/>
                 </a:solidFill>
               </a:rPr>
-              <a:t>85.5h · 19 subs finalizadas</a:t>
+              <a:t>89.5h · 20 subs finalizadas</a:t>
             </a:r>
             <a:endParaRPr lang="en-US" sz="950" dirty="0"/>
           </a:p>
